--- a/PPTX/Card2026.pptx
+++ b/PPTX/Card2026.pptx
@@ -4,11 +4,15 @@
   <p:sldMasterIdLst>
     <p:sldMasterId id="2147483648" r:id="rId1"/>
   </p:sldMasterIdLst>
+  <p:notesMasterIdLst>
+    <p:notesMasterId r:id="rId7"/>
+  </p:notesMasterIdLst>
   <p:sldIdLst>
     <p:sldId id="256" r:id="rId2"/>
-    <p:sldId id="259" r:id="rId3"/>
-    <p:sldId id="257" r:id="rId4"/>
-    <p:sldId id="258" r:id="rId5"/>
+    <p:sldId id="260" r:id="rId3"/>
+    <p:sldId id="259" r:id="rId4"/>
+    <p:sldId id="257" r:id="rId5"/>
+    <p:sldId id="258" r:id="rId6"/>
   </p:sldIdLst>
   <p:sldSz cx="12192000" cy="6858000"/>
   <p:notesSz cx="6858000" cy="9144000"/>
@@ -115,6 +119,835 @@
 </p:presentation>
 </file>
 
+<file path=ppt/notesMasters/notesMaster1.xml><?xml version="1.0" encoding="utf-8"?>
+<p:notesMaster xmlns:a="http://schemas.openxmlformats.org/drawingml/2006/main" xmlns:r="http://schemas.openxmlformats.org/officeDocument/2006/relationships" xmlns:p="http://schemas.openxmlformats.org/presentationml/2006/main">
+  <p:cSld>
+    <p:bg>
+      <p:bgRef idx="1001">
+        <a:schemeClr val="bg1"/>
+      </p:bgRef>
+    </p:bg>
+    <p:spTree>
+      <p:nvGrpSpPr>
+        <p:cNvPr id="1" name=""/>
+        <p:cNvGrpSpPr/>
+        <p:nvPr/>
+      </p:nvGrpSpPr>
+      <p:grpSpPr>
+        <a:xfrm>
+          <a:off x="0" y="0"/>
+          <a:ext cx="0" cy="0"/>
+          <a:chOff x="0" y="0"/>
+          <a:chExt cx="0" cy="0"/>
+        </a:xfrm>
+      </p:grpSpPr>
+      <p:sp>
+        <p:nvSpPr>
+          <p:cNvPr id="2" name="Header Placeholder 1"/>
+          <p:cNvSpPr>
+            <a:spLocks noGrp="1"/>
+          </p:cNvSpPr>
+          <p:nvPr>
+            <p:ph type="hdr" sz="quarter"/>
+          </p:nvPr>
+        </p:nvSpPr>
+        <p:spPr>
+          <a:xfrm>
+            <a:off x="0" y="0"/>
+            <a:ext cx="2971800" cy="458788"/>
+          </a:xfrm>
+          <a:prstGeom prst="rect">
+            <a:avLst/>
+          </a:prstGeom>
+        </p:spPr>
+        <p:txBody>
+          <a:bodyPr vert="horz" lIns="91440" tIns="45720" rIns="91440" bIns="45720" rtlCol="0"/>
+          <a:lstStyle>
+            <a:lvl1pPr algn="l">
+              <a:defRPr sz="1200"/>
+            </a:lvl1pPr>
+          </a:lstStyle>
+          <a:p>
+            <a:endParaRPr kumimoji="1" lang="ja-JP" altLang="en-US"/>
+          </a:p>
+        </p:txBody>
+      </p:sp>
+      <p:sp>
+        <p:nvSpPr>
+          <p:cNvPr id="3" name="Date Placeholder 2"/>
+          <p:cNvSpPr>
+            <a:spLocks noGrp="1"/>
+          </p:cNvSpPr>
+          <p:nvPr>
+            <p:ph type="dt" idx="1"/>
+          </p:nvPr>
+        </p:nvSpPr>
+        <p:spPr>
+          <a:xfrm>
+            <a:off x="3884613" y="0"/>
+            <a:ext cx="2971800" cy="458788"/>
+          </a:xfrm>
+          <a:prstGeom prst="rect">
+            <a:avLst/>
+          </a:prstGeom>
+        </p:spPr>
+        <p:txBody>
+          <a:bodyPr vert="horz" lIns="91440" tIns="45720" rIns="91440" bIns="45720" rtlCol="0"/>
+          <a:lstStyle>
+            <a:lvl1pPr algn="r">
+              <a:defRPr sz="1200"/>
+            </a:lvl1pPr>
+          </a:lstStyle>
+          <a:p>
+            <a:fld id="{1A6D387C-1801-43CF-AF88-1F3BDBE77E25}" type="datetimeFigureOut">
+              <a:rPr kumimoji="1" lang="ja-JP" altLang="en-US" smtClean="0"/>
+              <a:t>2026/10/6</a:t>
+            </a:fld>
+            <a:endParaRPr kumimoji="1" lang="ja-JP" altLang="en-US"/>
+          </a:p>
+        </p:txBody>
+      </p:sp>
+      <p:sp>
+        <p:nvSpPr>
+          <p:cNvPr id="4" name="Slide Image Placeholder 3"/>
+          <p:cNvSpPr>
+            <a:spLocks noGrp="1" noRot="1" noChangeAspect="1"/>
+          </p:cNvSpPr>
+          <p:nvPr>
+            <p:ph type="sldImg" idx="2"/>
+          </p:nvPr>
+        </p:nvSpPr>
+        <p:spPr>
+          <a:xfrm>
+            <a:off x="685800" y="1143000"/>
+            <a:ext cx="5486400" cy="3086100"/>
+          </a:xfrm>
+          <a:prstGeom prst="rect">
+            <a:avLst/>
+          </a:prstGeom>
+          <a:noFill/>
+          <a:ln w="12700">
+            <a:solidFill>
+              <a:prstClr val="black"/>
+            </a:solidFill>
+          </a:ln>
+        </p:spPr>
+        <p:txBody>
+          <a:bodyPr vert="horz" lIns="91440" tIns="45720" rIns="91440" bIns="45720" rtlCol="0" anchor="ctr"/>
+          <a:lstStyle/>
+          <a:p>
+            <a:endParaRPr lang="ja-JP" altLang="en-US"/>
+          </a:p>
+        </p:txBody>
+      </p:sp>
+      <p:sp>
+        <p:nvSpPr>
+          <p:cNvPr id="5" name="Notes Placeholder 4"/>
+          <p:cNvSpPr>
+            <a:spLocks noGrp="1"/>
+          </p:cNvSpPr>
+          <p:nvPr>
+            <p:ph type="body" sz="quarter" idx="3"/>
+          </p:nvPr>
+        </p:nvSpPr>
+        <p:spPr>
+          <a:xfrm>
+            <a:off x="685800" y="4400550"/>
+            <a:ext cx="5486400" cy="3600450"/>
+          </a:xfrm>
+          <a:prstGeom prst="rect">
+            <a:avLst/>
+          </a:prstGeom>
+        </p:spPr>
+        <p:txBody>
+          <a:bodyPr vert="horz" lIns="91440" tIns="45720" rIns="91440" bIns="45720" rtlCol="0"/>
+          <a:lstStyle/>
+          <a:p>
+            <a:pPr lvl="0"/>
+            <a:r>
+              <a:rPr kumimoji="1" lang="en-US" altLang="ja-JP"/>
+              <a:t>Click to edit Master text styles</a:t>
+            </a:r>
+          </a:p>
+          <a:p>
+            <a:pPr lvl="1"/>
+            <a:r>
+              <a:rPr kumimoji="1" lang="en-US" altLang="ja-JP"/>
+              <a:t>Second level</a:t>
+            </a:r>
+          </a:p>
+          <a:p>
+            <a:pPr lvl="2"/>
+            <a:r>
+              <a:rPr kumimoji="1" lang="en-US" altLang="ja-JP"/>
+              <a:t>Third level</a:t>
+            </a:r>
+          </a:p>
+          <a:p>
+            <a:pPr lvl="3"/>
+            <a:r>
+              <a:rPr kumimoji="1" lang="en-US" altLang="ja-JP"/>
+              <a:t>Fourth level</a:t>
+            </a:r>
+          </a:p>
+          <a:p>
+            <a:pPr lvl="4"/>
+            <a:r>
+              <a:rPr kumimoji="1" lang="en-US" altLang="ja-JP"/>
+              <a:t>Fifth level</a:t>
+            </a:r>
+            <a:endParaRPr kumimoji="1" lang="ja-JP" altLang="en-US"/>
+          </a:p>
+        </p:txBody>
+      </p:sp>
+      <p:sp>
+        <p:nvSpPr>
+          <p:cNvPr id="6" name="Footer Placeholder 5"/>
+          <p:cNvSpPr>
+            <a:spLocks noGrp="1"/>
+          </p:cNvSpPr>
+          <p:nvPr>
+            <p:ph type="ftr" sz="quarter" idx="4"/>
+          </p:nvPr>
+        </p:nvSpPr>
+        <p:spPr>
+          <a:xfrm>
+            <a:off x="0" y="8685213"/>
+            <a:ext cx="2971800" cy="458787"/>
+          </a:xfrm>
+          <a:prstGeom prst="rect">
+            <a:avLst/>
+          </a:prstGeom>
+        </p:spPr>
+        <p:txBody>
+          <a:bodyPr vert="horz" lIns="91440" tIns="45720" rIns="91440" bIns="45720" rtlCol="0" anchor="b"/>
+          <a:lstStyle>
+            <a:lvl1pPr algn="l">
+              <a:defRPr sz="1200"/>
+            </a:lvl1pPr>
+          </a:lstStyle>
+          <a:p>
+            <a:endParaRPr kumimoji="1" lang="ja-JP" altLang="en-US"/>
+          </a:p>
+        </p:txBody>
+      </p:sp>
+      <p:sp>
+        <p:nvSpPr>
+          <p:cNvPr id="7" name="Slide Number Placeholder 6"/>
+          <p:cNvSpPr>
+            <a:spLocks noGrp="1"/>
+          </p:cNvSpPr>
+          <p:nvPr>
+            <p:ph type="sldNum" sz="quarter" idx="5"/>
+          </p:nvPr>
+        </p:nvSpPr>
+        <p:spPr>
+          <a:xfrm>
+            <a:off x="3884613" y="8685213"/>
+            <a:ext cx="2971800" cy="458787"/>
+          </a:xfrm>
+          <a:prstGeom prst="rect">
+            <a:avLst/>
+          </a:prstGeom>
+        </p:spPr>
+        <p:txBody>
+          <a:bodyPr vert="horz" lIns="91440" tIns="45720" rIns="91440" bIns="45720" rtlCol="0" anchor="b"/>
+          <a:lstStyle>
+            <a:lvl1pPr algn="r">
+              <a:defRPr sz="1200"/>
+            </a:lvl1pPr>
+          </a:lstStyle>
+          <a:p>
+            <a:fld id="{B8AAD82C-0174-463E-B2F4-286F3D6C615B}" type="slidenum">
+              <a:rPr kumimoji="1" lang="ja-JP" altLang="en-US" smtClean="0"/>
+              <a:t>‹#›</a:t>
+            </a:fld>
+            <a:endParaRPr kumimoji="1" lang="ja-JP" altLang="en-US"/>
+          </a:p>
+        </p:txBody>
+      </p:sp>
+    </p:spTree>
+    <p:extLst>
+      <p:ext uri="{BB962C8B-B14F-4D97-AF65-F5344CB8AC3E}">
+        <p14:creationId xmlns:p14="http://schemas.microsoft.com/office/powerpoint/2010/main" val="147785276"/>
+      </p:ext>
+    </p:extLst>
+  </p:cSld>
+  <p:clrMap bg1="lt1" tx1="dk1" bg2="lt2" tx2="dk2" accent1="accent1" accent2="accent2" accent3="accent3" accent4="accent4" accent5="accent5" accent6="accent6" hlink="hlink" folHlink="folHlink"/>
+  <p:notesStyle>
+    <a:lvl1pPr marL="0" algn="l" defTabSz="914400" rtl="0" eaLnBrk="1" latinLnBrk="0" hangingPunct="1">
+      <a:defRPr kumimoji="1" sz="1200" kern="1200">
+        <a:solidFill>
+          <a:schemeClr val="tx1"/>
+        </a:solidFill>
+        <a:latin typeface="+mn-lt"/>
+        <a:ea typeface="+mn-ea"/>
+        <a:cs typeface="+mn-cs"/>
+      </a:defRPr>
+    </a:lvl1pPr>
+    <a:lvl2pPr marL="457200" algn="l" defTabSz="914400" rtl="0" eaLnBrk="1" latinLnBrk="0" hangingPunct="1">
+      <a:defRPr kumimoji="1" sz="1200" kern="1200">
+        <a:solidFill>
+          <a:schemeClr val="tx1"/>
+        </a:solidFill>
+        <a:latin typeface="+mn-lt"/>
+        <a:ea typeface="+mn-ea"/>
+        <a:cs typeface="+mn-cs"/>
+      </a:defRPr>
+    </a:lvl2pPr>
+    <a:lvl3pPr marL="914400" algn="l" defTabSz="914400" rtl="0" eaLnBrk="1" latinLnBrk="0" hangingPunct="1">
+      <a:defRPr kumimoji="1" sz="1200" kern="1200">
+        <a:solidFill>
+          <a:schemeClr val="tx1"/>
+        </a:solidFill>
+        <a:latin typeface="+mn-lt"/>
+        <a:ea typeface="+mn-ea"/>
+        <a:cs typeface="+mn-cs"/>
+      </a:defRPr>
+    </a:lvl3pPr>
+    <a:lvl4pPr marL="1371600" algn="l" defTabSz="914400" rtl="0" eaLnBrk="1" latinLnBrk="0" hangingPunct="1">
+      <a:defRPr kumimoji="1" sz="1200" kern="1200">
+        <a:solidFill>
+          <a:schemeClr val="tx1"/>
+        </a:solidFill>
+        <a:latin typeface="+mn-lt"/>
+        <a:ea typeface="+mn-ea"/>
+        <a:cs typeface="+mn-cs"/>
+      </a:defRPr>
+    </a:lvl4pPr>
+    <a:lvl5pPr marL="1828800" algn="l" defTabSz="914400" rtl="0" eaLnBrk="1" latinLnBrk="0" hangingPunct="1">
+      <a:defRPr kumimoji="1" sz="1200" kern="1200">
+        <a:solidFill>
+          <a:schemeClr val="tx1"/>
+        </a:solidFill>
+        <a:latin typeface="+mn-lt"/>
+        <a:ea typeface="+mn-ea"/>
+        <a:cs typeface="+mn-cs"/>
+      </a:defRPr>
+    </a:lvl5pPr>
+    <a:lvl6pPr marL="2286000" algn="l" defTabSz="914400" rtl="0" eaLnBrk="1" latinLnBrk="0" hangingPunct="1">
+      <a:defRPr kumimoji="1" sz="1200" kern="1200">
+        <a:solidFill>
+          <a:schemeClr val="tx1"/>
+        </a:solidFill>
+        <a:latin typeface="+mn-lt"/>
+        <a:ea typeface="+mn-ea"/>
+        <a:cs typeface="+mn-cs"/>
+      </a:defRPr>
+    </a:lvl6pPr>
+    <a:lvl7pPr marL="2743200" algn="l" defTabSz="914400" rtl="0" eaLnBrk="1" latinLnBrk="0" hangingPunct="1">
+      <a:defRPr kumimoji="1" sz="1200" kern="1200">
+        <a:solidFill>
+          <a:schemeClr val="tx1"/>
+        </a:solidFill>
+        <a:latin typeface="+mn-lt"/>
+        <a:ea typeface="+mn-ea"/>
+        <a:cs typeface="+mn-cs"/>
+      </a:defRPr>
+    </a:lvl7pPr>
+    <a:lvl8pPr marL="3200400" algn="l" defTabSz="914400" rtl="0" eaLnBrk="1" latinLnBrk="0" hangingPunct="1">
+      <a:defRPr kumimoji="1" sz="1200" kern="1200">
+        <a:solidFill>
+          <a:schemeClr val="tx1"/>
+        </a:solidFill>
+        <a:latin typeface="+mn-lt"/>
+        <a:ea typeface="+mn-ea"/>
+        <a:cs typeface="+mn-cs"/>
+      </a:defRPr>
+    </a:lvl8pPr>
+    <a:lvl9pPr marL="3657600" algn="l" defTabSz="914400" rtl="0" eaLnBrk="1" latinLnBrk="0" hangingPunct="1">
+      <a:defRPr kumimoji="1" sz="1200" kern="1200">
+        <a:solidFill>
+          <a:schemeClr val="tx1"/>
+        </a:solidFill>
+        <a:latin typeface="+mn-lt"/>
+        <a:ea typeface="+mn-ea"/>
+        <a:cs typeface="+mn-cs"/>
+      </a:defRPr>
+    </a:lvl9pPr>
+  </p:notesStyle>
+</p:notesMaster>
+</file>
+
+<file path=ppt/notesSlides/notesSlide1.xml><?xml version="1.0" encoding="utf-8"?>
+<p:notes xmlns:a="http://schemas.openxmlformats.org/drawingml/2006/main" xmlns:r="http://schemas.openxmlformats.org/officeDocument/2006/relationships" xmlns:p="http://schemas.openxmlformats.org/presentationml/2006/main">
+  <p:cSld>
+    <p:spTree>
+      <p:nvGrpSpPr>
+        <p:cNvPr id="1" name=""/>
+        <p:cNvGrpSpPr/>
+        <p:nvPr/>
+      </p:nvGrpSpPr>
+      <p:grpSpPr>
+        <a:xfrm>
+          <a:off x="0" y="0"/>
+          <a:ext cx="0" cy="0"/>
+          <a:chOff x="0" y="0"/>
+          <a:chExt cx="0" cy="0"/>
+        </a:xfrm>
+      </p:grpSpPr>
+      <p:sp>
+        <p:nvSpPr>
+          <p:cNvPr id="2" name="Slide Image Placeholder 1"/>
+          <p:cNvSpPr>
+            <a:spLocks noGrp="1" noRot="1" noChangeAspect="1"/>
+          </p:cNvSpPr>
+          <p:nvPr>
+            <p:ph type="sldImg"/>
+          </p:nvPr>
+        </p:nvSpPr>
+        <p:spPr/>
+      </p:sp>
+      <mc:AlternateContent xmlns:mc="http://schemas.openxmlformats.org/markup-compatibility/2006">
+        <mc:Choice xmlns:a14="http://schemas.microsoft.com/office/drawing/2010/main" Requires="a14">
+          <p:sp>
+            <p:nvSpPr>
+              <p:cNvPr id="3" name="Notes Placeholder 2"/>
+              <p:cNvSpPr>
+                <a:spLocks noGrp="1"/>
+              </p:cNvSpPr>
+              <p:nvPr>
+                <p:ph type="body" idx="1"/>
+              </p:nvPr>
+            </p:nvSpPr>
+            <p:spPr/>
+            <p:txBody>
+              <a:bodyPr/>
+              <a:lstStyle/>
+              <a:p>
+                <a:r>
+                  <a:rPr kumimoji="1" lang="en-US" altLang="ja-JP" dirty="0"/>
+                  <a:t>$$\Delta x \times \Delta </a:t>
+                </a:r>
+                <a:r>
+                  <a:rPr kumimoji="1" lang="en-US" altLang="ja-JP" dirty="0" err="1"/>
+                  <a:t>p_x</a:t>
+                </a:r>
+                <a:r>
+                  <a:rPr kumimoji="1" lang="en-US" altLang="ja-JP" dirty="0"/>
+                  <a:t> \</a:t>
+                </a:r>
+                <a:r>
+                  <a:rPr kumimoji="1" lang="en-US" altLang="ja-JP" dirty="0" err="1"/>
+                  <a:t>geq</a:t>
+                </a:r>
+                <a:r>
+                  <a:rPr kumimoji="1" lang="en-US" altLang="ja-JP" dirty="0"/>
+                  <a:t> \frac{h}{4\pi},\quad h := 6.62607015\times 10^{-34}$$$$\Delta I=k \ln \frac{\#\mbox{Possible cases}_{\</a:t>
+                </a:r>
+                <a:r>
+                  <a:rPr kumimoji="1" lang="en-US" altLang="ja-JP" dirty="0" err="1"/>
+                  <a:t>mbox</a:t>
+                </a:r>
+                <a:r>
+                  <a:rPr kumimoji="1" lang="en-US" altLang="ja-JP" dirty="0"/>
+                  <a:t>{before}}}{\</a:t>
+                </a:r>
+                <a:r>
+                  <a:rPr kumimoji="1" lang="en-US" altLang="ja-JP" dirty="0" err="1"/>
+                  <a:t>mbox</a:t>
+                </a:r>
+                <a:r>
+                  <a:rPr kumimoji="1" lang="en-US" altLang="ja-JP" dirty="0"/>
+                  <a:t>{Possible cases}_{\</a:t>
+                </a:r>
+                <a:r>
+                  <a:rPr kumimoji="1" lang="en-US" altLang="ja-JP" dirty="0" err="1"/>
+                  <a:t>mbox</a:t>
+                </a:r>
+                <a:r>
+                  <a:rPr kumimoji="1" lang="en-US" altLang="ja-JP" dirty="0"/>
+                  <a:t>{after}}}$$$$\underbrace{\Delta S}_{\</a:t>
+                </a:r>
+                <a:r>
+                  <a:rPr kumimoji="1" lang="en-US" altLang="ja-JP" dirty="0" err="1"/>
+                  <a:t>mbox</a:t>
+                </a:r>
+                <a:r>
+                  <a:rPr kumimoji="1" lang="en-US" altLang="ja-JP" dirty="0"/>
+                  <a:t>{Increase in entropy}} \</a:t>
+                </a:r>
+                <a:r>
+                  <a:rPr kumimoji="1" lang="en-US" altLang="ja-JP" dirty="0" err="1"/>
+                  <a:t>geq</a:t>
+                </a:r>
+                <a:r>
+                  <a:rPr kumimoji="1" lang="en-US" altLang="ja-JP" dirty="0"/>
+                  <a:t> \underbrace{\Delta I}_{\</a:t>
+                </a:r>
+                <a:r>
+                  <a:rPr kumimoji="1" lang="en-US" altLang="ja-JP" dirty="0" err="1"/>
+                  <a:t>mbox</a:t>
+                </a:r>
+                <a:r>
+                  <a:rPr kumimoji="1" lang="en-US" altLang="ja-JP" dirty="0"/>
+                  <a:t>{gained by observation}}$$$$\Delta E \Delta x\</a:t>
+                </a:r>
+                <a:r>
+                  <a:rPr kumimoji="1" lang="en-US" altLang="ja-JP" dirty="0" err="1"/>
+                  <a:t>geq</a:t>
+                </a:r>
+                <a:r>
+                  <a:rPr kumimoji="1" lang="en-US" altLang="ja-JP" dirty="0"/>
+                  <a:t> \frac{1}{2} </a:t>
+                </a:r>
+                <a:r>
+                  <a:rPr kumimoji="1" lang="en-US" altLang="ja-JP" dirty="0" err="1"/>
+                  <a:t>hc</a:t>
+                </a:r>
+                <a:r>
+                  <a:rPr kumimoji="1" lang="en-US" altLang="ja-JP" dirty="0"/>
+                  <a:t>$$</a:t>
+                </a:r>
+              </a:p>
+              <a:p>
+                <a:endParaRPr kumimoji="1" lang="en-US" altLang="ja-JP" dirty="0"/>
+              </a:p>
+              <a:p>
+                <a14:m>
+                  <m:oMathPara xmlns:m="http://schemas.openxmlformats.org/officeDocument/2006/math">
+                    <m:oMath>
+                      <m:r>
+                        <m:rPr>
+                          <m:sty m:val="p"/>
+                        </m:rPr>
+                        <a:rPr kumimoji="1" lang="en-US" altLang="ja-JP" dirty="0" smtClean="0">
+                          <a:latin typeface="Cambria Math" panose="02040503050406030204" pitchFamily="18" charset="0"/>
+                        </a:rPr>
+                        <m:t>Δ</m:t>
+                      </m:r>
+                      <m:r>
+                        <a:rPr kumimoji="1" lang="en-US" altLang="ja-JP" i="1" dirty="0" smtClean="0">
+                          <a:latin typeface="Cambria Math" panose="02040503050406030204" pitchFamily="18" charset="0"/>
+                        </a:rPr>
+                        <m:t>𝐼</m:t>
+                      </m:r>
+                      <m:r>
+                        <a:rPr kumimoji="1" lang="en-US" altLang="ja-JP" i="0" dirty="0" smtClean="0">
+                          <a:latin typeface="Cambria Math" panose="02040503050406030204" pitchFamily="18" charset="0"/>
+                        </a:rPr>
+                        <m:t>+</m:t>
+                      </m:r>
+                      <m:r>
+                        <m:rPr>
+                          <m:sty m:val="p"/>
+                        </m:rPr>
+                        <a:rPr kumimoji="1" lang="en-US" altLang="ja-JP" i="0" dirty="0" smtClean="0">
+                          <a:latin typeface="Cambria Math" panose="02040503050406030204" pitchFamily="18" charset="0"/>
+                        </a:rPr>
+                        <m:t>Δ</m:t>
+                      </m:r>
+                      <m:r>
+                        <a:rPr kumimoji="1" lang="en-US" altLang="ja-JP" i="1" dirty="0" smtClean="0">
+                          <a:latin typeface="Cambria Math" panose="02040503050406030204" pitchFamily="18" charset="0"/>
+                        </a:rPr>
+                        <m:t>𝑁</m:t>
+                      </m:r>
+                      <m:r>
+                        <a:rPr kumimoji="1" lang="en-US" altLang="ja-JP" i="0" dirty="0" smtClean="0">
+                          <a:latin typeface="Cambria Math" panose="02040503050406030204" pitchFamily="18" charset="0"/>
+                        </a:rPr>
+                        <m:t>≤0, </m:t>
+                      </m:r>
+                      <m:r>
+                        <m:rPr>
+                          <m:sty m:val="p"/>
+                        </m:rPr>
+                        <a:rPr kumimoji="1" lang="en-US" altLang="ja-JP" i="0" dirty="0" smtClean="0">
+                          <a:latin typeface="Cambria Math" panose="02040503050406030204" pitchFamily="18" charset="0"/>
+                        </a:rPr>
+                        <m:t>Δ</m:t>
+                      </m:r>
+                      <m:r>
+                        <a:rPr kumimoji="1" lang="en-US" altLang="ja-JP" i="1" dirty="0" smtClean="0">
+                          <a:latin typeface="Cambria Math" panose="02040503050406030204" pitchFamily="18" charset="0"/>
+                        </a:rPr>
+                        <m:t>𝑁</m:t>
+                      </m:r>
+                      <m:r>
+                        <a:rPr kumimoji="1" lang="en-US" altLang="ja-JP" i="0" dirty="0" smtClean="0">
+                          <a:latin typeface="Cambria Math" panose="02040503050406030204" pitchFamily="18" charset="0"/>
+                        </a:rPr>
+                        <m:t>=−</m:t>
+                      </m:r>
+                      <m:r>
+                        <m:rPr>
+                          <m:sty m:val="p"/>
+                        </m:rPr>
+                        <a:rPr kumimoji="1" lang="en-US" altLang="ja-JP" i="0" dirty="0" smtClean="0">
+                          <a:latin typeface="Cambria Math" panose="02040503050406030204" pitchFamily="18" charset="0"/>
+                        </a:rPr>
+                        <m:t>Δ</m:t>
+                      </m:r>
+                      <m:r>
+                        <a:rPr kumimoji="1" lang="en-US" altLang="ja-JP" i="1" dirty="0" smtClean="0">
+                          <a:latin typeface="Cambria Math" panose="02040503050406030204" pitchFamily="18" charset="0"/>
+                        </a:rPr>
+                        <m:t>𝑆</m:t>
+                      </m:r>
+                    </m:oMath>
+                  </m:oMathPara>
+                </a14:m>
+                <a:endParaRPr kumimoji="1" lang="en-US" altLang="ja-JP" dirty="0"/>
+              </a:p>
+              <a:p>
+                <a:endParaRPr kumimoji="1" lang="en-US" altLang="ja-JP" dirty="0"/>
+              </a:p>
+              <a:p>
+                <a14:m>
+                  <m:oMathPara xmlns:m="http://schemas.openxmlformats.org/officeDocument/2006/math">
+                    <m:oMath>
+                      <m:r>
+                        <m:rPr>
+                          <m:sty m:val="p"/>
+                        </m:rPr>
+                        <a:rPr kumimoji="1" lang="ja-JP" altLang="en-US" dirty="0" smtClean="0">
+                          <a:latin typeface="Cambria Math" panose="02040503050406030204" pitchFamily="18" charset="0"/>
+                        </a:rPr>
+                        <m:t>Δ</m:t>
+                      </m:r>
+                      <m:r>
+                        <a:rPr kumimoji="1" lang="ja-JP" altLang="en-US" i="1" dirty="0">
+                          <a:latin typeface="Cambria Math" panose="02040503050406030204" pitchFamily="18" charset="0"/>
+                        </a:rPr>
+                        <m:t>𝐼</m:t>
+                      </m:r>
+                      <m:r>
+                        <a:rPr kumimoji="1" lang="ja-JP" altLang="en-US" i="0" dirty="0">
+                          <a:latin typeface="Cambria Math" panose="02040503050406030204" pitchFamily="18" charset="0"/>
+                        </a:rPr>
+                        <m:t>+</m:t>
+                      </m:r>
+                      <m:r>
+                        <m:rPr>
+                          <m:sty m:val="p"/>
+                        </m:rPr>
+                        <a:rPr kumimoji="1" lang="ja-JP" altLang="en-US" i="0" dirty="0">
+                          <a:latin typeface="Cambria Math" panose="02040503050406030204" pitchFamily="18" charset="0"/>
+                        </a:rPr>
+                        <m:t>Δ</m:t>
+                      </m:r>
+                      <m:r>
+                        <a:rPr kumimoji="1" lang="ja-JP" altLang="en-US" i="1" dirty="0">
+                          <a:latin typeface="Cambria Math" panose="02040503050406030204" pitchFamily="18" charset="0"/>
+                        </a:rPr>
+                        <m:t>𝑁</m:t>
+                      </m:r>
+                      <m:r>
+                        <a:rPr kumimoji="1" lang="ja-JP" altLang="en-US" i="0" dirty="0">
+                          <a:latin typeface="Cambria Math" panose="02040503050406030204" pitchFamily="18" charset="0"/>
+                        </a:rPr>
+                        <m:t>≤0, </m:t>
+                      </m:r>
+                      <m:r>
+                        <m:rPr>
+                          <m:sty m:val="p"/>
+                        </m:rPr>
+                        <a:rPr kumimoji="1" lang="ja-JP" altLang="en-US" i="0" dirty="0">
+                          <a:latin typeface="Cambria Math" panose="02040503050406030204" pitchFamily="18" charset="0"/>
+                        </a:rPr>
+                        <m:t>Δ</m:t>
+                      </m:r>
+                      <m:r>
+                        <a:rPr kumimoji="1" lang="ja-JP" altLang="en-US" i="1" dirty="0">
+                          <a:latin typeface="Cambria Math" panose="02040503050406030204" pitchFamily="18" charset="0"/>
+                        </a:rPr>
+                        <m:t>𝑁</m:t>
+                      </m:r>
+                      <m:r>
+                        <a:rPr kumimoji="1" lang="ja-JP" altLang="en-US" i="0" dirty="0">
+                          <a:latin typeface="Cambria Math" panose="02040503050406030204" pitchFamily="18" charset="0"/>
+                        </a:rPr>
+                        <m:t>=−</m:t>
+                      </m:r>
+                      <m:r>
+                        <m:rPr>
+                          <m:sty m:val="p"/>
+                        </m:rPr>
+                        <a:rPr kumimoji="1" lang="ja-JP" altLang="en-US" i="0" dirty="0">
+                          <a:latin typeface="Cambria Math" panose="02040503050406030204" pitchFamily="18" charset="0"/>
+                        </a:rPr>
+                        <m:t>Δ</m:t>
+                      </m:r>
+                      <m:r>
+                        <a:rPr kumimoji="1" lang="ja-JP" altLang="en-US" i="1" dirty="0">
+                          <a:latin typeface="Cambria Math" panose="02040503050406030204" pitchFamily="18" charset="0"/>
+                        </a:rPr>
+                        <m:t>𝑆</m:t>
+                      </m:r>
+                    </m:oMath>
+                  </m:oMathPara>
+                </a14:m>
+                <a:endParaRPr kumimoji="1" lang="ja-JP" altLang="en-US" dirty="0"/>
+              </a:p>
+            </p:txBody>
+          </p:sp>
+        </mc:Choice>
+        <mc:Fallback>
+          <p:sp>
+            <p:nvSpPr>
+              <p:cNvPr id="3" name="Notes Placeholder 2"/>
+              <p:cNvSpPr>
+                <a:spLocks noGrp="1"/>
+              </p:cNvSpPr>
+              <p:nvPr>
+                <p:ph type="body" idx="1"/>
+              </p:nvPr>
+            </p:nvSpPr>
+            <p:spPr/>
+            <p:txBody>
+              <a:bodyPr/>
+              <a:lstStyle/>
+              <a:p>
+                <a:r>
+                  <a:rPr kumimoji="1" lang="en-US" altLang="ja-JP" dirty="0"/>
+                  <a:t>$$\Delta x \times \Delta </a:t>
+                </a:r>
+                <a:r>
+                  <a:rPr kumimoji="1" lang="en-US" altLang="ja-JP" dirty="0" err="1"/>
+                  <a:t>p_x</a:t>
+                </a:r>
+                <a:r>
+                  <a:rPr kumimoji="1" lang="en-US" altLang="ja-JP" dirty="0"/>
+                  <a:t> \</a:t>
+                </a:r>
+                <a:r>
+                  <a:rPr kumimoji="1" lang="en-US" altLang="ja-JP" dirty="0" err="1"/>
+                  <a:t>geq</a:t>
+                </a:r>
+                <a:r>
+                  <a:rPr kumimoji="1" lang="en-US" altLang="ja-JP" dirty="0"/>
+                  <a:t> \frac{h}{4\pi},\quad h := 6.62607015\times 10^{-34}$$$$\Delta I=k \ln \frac{\#\mbox{Possible cases}_{\</a:t>
+                </a:r>
+                <a:r>
+                  <a:rPr kumimoji="1" lang="en-US" altLang="ja-JP" dirty="0" err="1"/>
+                  <a:t>mbox</a:t>
+                </a:r>
+                <a:r>
+                  <a:rPr kumimoji="1" lang="en-US" altLang="ja-JP" dirty="0"/>
+                  <a:t>{before}}}{\</a:t>
+                </a:r>
+                <a:r>
+                  <a:rPr kumimoji="1" lang="en-US" altLang="ja-JP" dirty="0" err="1"/>
+                  <a:t>mbox</a:t>
+                </a:r>
+                <a:r>
+                  <a:rPr kumimoji="1" lang="en-US" altLang="ja-JP" dirty="0"/>
+                  <a:t>{Possible cases}_{\</a:t>
+                </a:r>
+                <a:r>
+                  <a:rPr kumimoji="1" lang="en-US" altLang="ja-JP" dirty="0" err="1"/>
+                  <a:t>mbox</a:t>
+                </a:r>
+                <a:r>
+                  <a:rPr kumimoji="1" lang="en-US" altLang="ja-JP" dirty="0"/>
+                  <a:t>{after}}}$$$$\underbrace{\Delta S}_{\</a:t>
+                </a:r>
+                <a:r>
+                  <a:rPr kumimoji="1" lang="en-US" altLang="ja-JP" dirty="0" err="1"/>
+                  <a:t>mbox</a:t>
+                </a:r>
+                <a:r>
+                  <a:rPr kumimoji="1" lang="en-US" altLang="ja-JP" dirty="0"/>
+                  <a:t>{Increase in entropy}} \</a:t>
+                </a:r>
+                <a:r>
+                  <a:rPr kumimoji="1" lang="en-US" altLang="ja-JP" dirty="0" err="1"/>
+                  <a:t>geq</a:t>
+                </a:r>
+                <a:r>
+                  <a:rPr kumimoji="1" lang="en-US" altLang="ja-JP" dirty="0"/>
+                  <a:t> \underbrace{\Delta I}_{\</a:t>
+                </a:r>
+                <a:r>
+                  <a:rPr kumimoji="1" lang="en-US" altLang="ja-JP" dirty="0" err="1"/>
+                  <a:t>mbox</a:t>
+                </a:r>
+                <a:r>
+                  <a:rPr kumimoji="1" lang="en-US" altLang="ja-JP" dirty="0"/>
+                  <a:t>{gained by observation}}$$$$\Delta E \Delta x\</a:t>
+                </a:r>
+                <a:r>
+                  <a:rPr kumimoji="1" lang="en-US" altLang="ja-JP" dirty="0" err="1"/>
+                  <a:t>geq</a:t>
+                </a:r>
+                <a:r>
+                  <a:rPr kumimoji="1" lang="en-US" altLang="ja-JP" dirty="0"/>
+                  <a:t> \frac{1}{2} </a:t>
+                </a:r>
+                <a:r>
+                  <a:rPr kumimoji="1" lang="en-US" altLang="ja-JP" dirty="0" err="1"/>
+                  <a:t>hc</a:t>
+                </a:r>
+                <a:r>
+                  <a:rPr kumimoji="1" lang="en-US" altLang="ja-JP" dirty="0"/>
+                  <a:t>$$</a:t>
+                </a:r>
+              </a:p>
+              <a:p>
+                <a:endParaRPr kumimoji="1" lang="en-US" altLang="ja-JP" dirty="0"/>
+              </a:p>
+              <a:p>
+                <a:r>
+                  <a:rPr kumimoji="1" lang="en-US" altLang="ja-JP" i="0" dirty="0">
+                    <a:latin typeface="Cambria Math" panose="02040503050406030204" pitchFamily="18" charset="0"/>
+                  </a:rPr>
+                  <a:t>Δ𝐼+Δ𝑁≤0, Δ𝑁=−Δ𝑆</a:t>
+                </a:r>
+                <a:endParaRPr kumimoji="1" lang="en-US" altLang="ja-JP" dirty="0"/>
+              </a:p>
+              <a:p>
+                <a:endParaRPr kumimoji="1" lang="en-US" altLang="ja-JP" dirty="0"/>
+              </a:p>
+              <a:p>
+                <a:r>
+                  <a:rPr kumimoji="1" lang="ja-JP" altLang="en-US" i="0" dirty="0">
+                    <a:latin typeface="Cambria Math" panose="02040503050406030204" pitchFamily="18" charset="0"/>
+                  </a:rPr>
+                  <a:t>Δ𝐼+Δ𝑁≤0, Δ𝑁=−Δ𝑆</a:t>
+                </a:r>
+                <a:endParaRPr kumimoji="1" lang="ja-JP" altLang="en-US" dirty="0"/>
+              </a:p>
+            </p:txBody>
+          </p:sp>
+        </mc:Fallback>
+      </mc:AlternateContent>
+      <p:sp>
+        <p:nvSpPr>
+          <p:cNvPr id="4" name="Slide Number Placeholder 3"/>
+          <p:cNvSpPr>
+            <a:spLocks noGrp="1"/>
+          </p:cNvSpPr>
+          <p:nvPr>
+            <p:ph type="sldNum" sz="quarter" idx="5"/>
+          </p:nvPr>
+        </p:nvSpPr>
+        <p:spPr/>
+        <p:txBody>
+          <a:bodyPr/>
+          <a:lstStyle/>
+          <a:p>
+            <a:fld id="{B8AAD82C-0174-463E-B2F4-286F3D6C615B}" type="slidenum">
+              <a:rPr kumimoji="1" lang="ja-JP" altLang="en-US" smtClean="0"/>
+              <a:t>2</a:t>
+            </a:fld>
+            <a:endParaRPr kumimoji="1" lang="ja-JP" altLang="en-US"/>
+          </a:p>
+        </p:txBody>
+      </p:sp>
+    </p:spTree>
+    <p:extLst>
+      <p:ext uri="{BB962C8B-B14F-4D97-AF65-F5344CB8AC3E}">
+        <p14:creationId xmlns:p14="http://schemas.microsoft.com/office/powerpoint/2010/main" val="970855865"/>
+      </p:ext>
+    </p:extLst>
+  </p:cSld>
+  <p:clrMapOvr>
+    <a:masterClrMapping/>
+  </p:clrMapOvr>
+</p:notes>
+</file>
+
 <file path=ppt/slideLayouts/slideLayout1.xml><?xml version="1.0" encoding="utf-8"?>
 <p:sldLayout xmlns:a="http://schemas.openxmlformats.org/drawingml/2006/main" xmlns:r="http://schemas.openxmlformats.org/officeDocument/2006/relationships" xmlns:p="http://schemas.openxmlformats.org/presentationml/2006/main" type="title" preserve="1">
   <p:cSld name="Title Slide">
@@ -264,7 +1097,7 @@
           <a:p>
             <a:fld id="{1AF6E655-73BE-475C-A322-465F16C35255}" type="datetimeFigureOut">
               <a:rPr kumimoji="1" lang="ja-JP" altLang="en-US" smtClean="0"/>
-              <a:t>2026/9/11</a:t>
+              <a:t>2026/10/6</a:t>
             </a:fld>
             <a:endParaRPr kumimoji="1" lang="ja-JP" altLang="en-US"/>
           </a:p>
@@ -464,7 +1297,7 @@
           <a:p>
             <a:fld id="{1AF6E655-73BE-475C-A322-465F16C35255}" type="datetimeFigureOut">
               <a:rPr kumimoji="1" lang="ja-JP" altLang="en-US" smtClean="0"/>
-              <a:t>2026/9/11</a:t>
+              <a:t>2026/10/6</a:t>
             </a:fld>
             <a:endParaRPr kumimoji="1" lang="ja-JP" altLang="en-US"/>
           </a:p>
@@ -674,7 +1507,7 @@
           <a:p>
             <a:fld id="{1AF6E655-73BE-475C-A322-465F16C35255}" type="datetimeFigureOut">
               <a:rPr kumimoji="1" lang="ja-JP" altLang="en-US" smtClean="0"/>
-              <a:t>2026/9/11</a:t>
+              <a:t>2026/10/6</a:t>
             </a:fld>
             <a:endParaRPr kumimoji="1" lang="ja-JP" altLang="en-US"/>
           </a:p>
@@ -874,7 +1707,7 @@
           <a:p>
             <a:fld id="{1AF6E655-73BE-475C-A322-465F16C35255}" type="datetimeFigureOut">
               <a:rPr kumimoji="1" lang="ja-JP" altLang="en-US" smtClean="0"/>
-              <a:t>2026/9/11</a:t>
+              <a:t>2026/10/6</a:t>
             </a:fld>
             <a:endParaRPr kumimoji="1" lang="ja-JP" altLang="en-US"/>
           </a:p>
@@ -1150,7 +1983,7 @@
           <a:p>
             <a:fld id="{1AF6E655-73BE-475C-A322-465F16C35255}" type="datetimeFigureOut">
               <a:rPr kumimoji="1" lang="ja-JP" altLang="en-US" smtClean="0"/>
-              <a:t>2026/9/11</a:t>
+              <a:t>2026/10/6</a:t>
             </a:fld>
             <a:endParaRPr kumimoji="1" lang="ja-JP" altLang="en-US"/>
           </a:p>
@@ -1418,7 +2251,7 @@
           <a:p>
             <a:fld id="{1AF6E655-73BE-475C-A322-465F16C35255}" type="datetimeFigureOut">
               <a:rPr kumimoji="1" lang="ja-JP" altLang="en-US" smtClean="0"/>
-              <a:t>2026/9/11</a:t>
+              <a:t>2026/10/6</a:t>
             </a:fld>
             <a:endParaRPr kumimoji="1" lang="ja-JP" altLang="en-US"/>
           </a:p>
@@ -1833,7 +2666,7 @@
           <a:p>
             <a:fld id="{1AF6E655-73BE-475C-A322-465F16C35255}" type="datetimeFigureOut">
               <a:rPr kumimoji="1" lang="ja-JP" altLang="en-US" smtClean="0"/>
-              <a:t>2026/9/11</a:t>
+              <a:t>2026/10/6</a:t>
             </a:fld>
             <a:endParaRPr kumimoji="1" lang="ja-JP" altLang="en-US"/>
           </a:p>
@@ -1975,7 +2808,7 @@
           <a:p>
             <a:fld id="{1AF6E655-73BE-475C-A322-465F16C35255}" type="datetimeFigureOut">
               <a:rPr kumimoji="1" lang="ja-JP" altLang="en-US" smtClean="0"/>
-              <a:t>2026/9/11</a:t>
+              <a:t>2026/10/6</a:t>
             </a:fld>
             <a:endParaRPr kumimoji="1" lang="ja-JP" altLang="en-US"/>
           </a:p>
@@ -2088,7 +2921,7 @@
           <a:p>
             <a:fld id="{1AF6E655-73BE-475C-A322-465F16C35255}" type="datetimeFigureOut">
               <a:rPr kumimoji="1" lang="ja-JP" altLang="en-US" smtClean="0"/>
-              <a:t>2026/9/11</a:t>
+              <a:t>2026/10/6</a:t>
             </a:fld>
             <a:endParaRPr kumimoji="1" lang="ja-JP" altLang="en-US"/>
           </a:p>
@@ -2401,7 +3234,7 @@
           <a:p>
             <a:fld id="{1AF6E655-73BE-475C-A322-465F16C35255}" type="datetimeFigureOut">
               <a:rPr kumimoji="1" lang="ja-JP" altLang="en-US" smtClean="0"/>
-              <a:t>2026/9/11</a:t>
+              <a:t>2026/10/6</a:t>
             </a:fld>
             <a:endParaRPr kumimoji="1" lang="ja-JP" altLang="en-US"/>
           </a:p>
@@ -2690,7 +3523,7 @@
           <a:p>
             <a:fld id="{1AF6E655-73BE-475C-A322-465F16C35255}" type="datetimeFigureOut">
               <a:rPr kumimoji="1" lang="ja-JP" altLang="en-US" smtClean="0"/>
-              <a:t>2026/9/11</a:t>
+              <a:t>2026/10/6</a:t>
             </a:fld>
             <a:endParaRPr kumimoji="1" lang="ja-JP" altLang="en-US"/>
           </a:p>
@@ -2933,7 +3766,7 @@
           <a:p>
             <a:fld id="{1AF6E655-73BE-475C-A322-465F16C35255}" type="datetimeFigureOut">
               <a:rPr kumimoji="1" lang="ja-JP" altLang="en-US" smtClean="0"/>
-              <a:t>2026/9/11</a:t>
+              <a:t>2026/10/6</a:t>
             </a:fld>
             <a:endParaRPr kumimoji="1" lang="ja-JP" altLang="en-US"/>
           </a:p>
@@ -3866,42 +4699,188 @@
           <a:chExt cx="0" cy="0"/>
         </a:xfrm>
       </p:grpSpPr>
-      <p:pic>
-        <p:nvPicPr>
-          <p:cNvPr id="8" name="Picture 7">
-            <a:extLst>
-              <a:ext uri="{FF2B5EF4-FFF2-40B4-BE49-F238E27FC236}">
-                <a16:creationId xmlns:a16="http://schemas.microsoft.com/office/drawing/2014/main" id="{161AD8D0-CE3B-F570-FFBB-4922B009FD8C}"/>
-              </a:ext>
-            </a:extLst>
-          </p:cNvPr>
-          <p:cNvPicPr>
-            <a:picLocks noChangeAspect="1"/>
-          </p:cNvPicPr>
+      <p:sp>
+        <p:nvSpPr>
+          <p:cNvPr id="2" name="Title 1">
+            <a:extLst>
+              <a:ext uri="{FF2B5EF4-FFF2-40B4-BE49-F238E27FC236}">
+                <a16:creationId xmlns:a16="http://schemas.microsoft.com/office/drawing/2014/main" id="{3BF7157A-5BA6-2AA4-C10A-0EAB90321E95}"/>
+              </a:ext>
+            </a:extLst>
+          </p:cNvPr>
+          <p:cNvSpPr>
+            <a:spLocks noGrp="1"/>
+          </p:cNvSpPr>
+          <p:nvPr>
+            <p:ph type="title"/>
+          </p:nvPr>
+        </p:nvSpPr>
+        <p:spPr>
+          <a:xfrm>
+            <a:off x="200332" y="-55023"/>
+            <a:ext cx="11275142" cy="1325563"/>
+          </a:xfrm>
+        </p:spPr>
+        <p:txBody>
+          <a:bodyPr/>
+          <a:lstStyle/>
+          <a:p>
+            <a:r>
+              <a:rPr kumimoji="1" lang="en-US" altLang="ja-JP" b="1" dirty="0">
+                <a:solidFill>
+                  <a:srgbClr val="0000FF"/>
+                </a:solidFill>
+              </a:rPr>
+              <a:t>Brillouin’s negentropy principle of information</a:t>
+            </a:r>
+            <a:endParaRPr kumimoji="1" lang="ja-JP" altLang="en-US" b="1" dirty="0">
+              <a:solidFill>
+                <a:srgbClr val="0000FF"/>
+              </a:solidFill>
+            </a:endParaRPr>
+          </a:p>
+        </p:txBody>
+      </p:sp>
+      <p:sp>
+        <p:nvSpPr>
+          <p:cNvPr id="3" name="TextBox 2">
+            <a:extLst>
+              <a:ext uri="{FF2B5EF4-FFF2-40B4-BE49-F238E27FC236}">
+                <a16:creationId xmlns:a16="http://schemas.microsoft.com/office/drawing/2014/main" id="{FDCDF117-FF6E-09DC-ABE1-D6CAC6F3F241}"/>
+              </a:ext>
+            </a:extLst>
+          </p:cNvPr>
+          <p:cNvSpPr txBox="1"/>
           <p:nvPr/>
-        </p:nvPicPr>
-        <p:blipFill>
-          <a:blip r:embed="rId2"/>
-          <a:stretch>
-            <a:fillRect/>
-          </a:stretch>
-        </p:blipFill>
-        <p:spPr>
-          <a:xfrm>
-            <a:off x="0" y="827088"/>
-            <a:ext cx="3302622" cy="5046530"/>
+        </p:nvSpPr>
+        <p:spPr>
+          <a:xfrm>
+            <a:off x="0" y="1335975"/>
+            <a:ext cx="6655989" cy="584775"/>
           </a:xfrm>
           <a:prstGeom prst="rect">
             <a:avLst/>
           </a:prstGeom>
-        </p:spPr>
-      </p:pic>
+          <a:noFill/>
+        </p:spPr>
+        <p:txBody>
+          <a:bodyPr wrap="none" rtlCol="0">
+            <a:spAutoFit/>
+          </a:bodyPr>
+          <a:lstStyle/>
+          <a:p>
+            <a:r>
+              <a:rPr kumimoji="1" lang="en-US" altLang="ja-JP" sz="3200" dirty="0"/>
+              <a:t>Heisenberg’s uncertainty principle</a:t>
+            </a:r>
+            <a:endParaRPr kumimoji="1" lang="ja-JP" altLang="en-US" sz="3200" dirty="0"/>
+          </a:p>
+        </p:txBody>
+      </p:sp>
+      <p:sp>
+        <p:nvSpPr>
+          <p:cNvPr id="6" name="TextBox 5">
+            <a:extLst>
+              <a:ext uri="{FF2B5EF4-FFF2-40B4-BE49-F238E27FC236}">
+                <a16:creationId xmlns:a16="http://schemas.microsoft.com/office/drawing/2014/main" id="{C0E1D6FF-7EAD-67BE-6C52-56A310A525DE}"/>
+              </a:ext>
+            </a:extLst>
+          </p:cNvPr>
+          <p:cNvSpPr txBox="1"/>
+          <p:nvPr/>
+        </p:nvSpPr>
+        <p:spPr>
+          <a:xfrm>
+            <a:off x="63277" y="3203796"/>
+            <a:ext cx="7308411" cy="584775"/>
+          </a:xfrm>
+          <a:prstGeom prst="rect">
+            <a:avLst/>
+          </a:prstGeom>
+          <a:noFill/>
+        </p:spPr>
+        <p:txBody>
+          <a:bodyPr wrap="none" rtlCol="0">
+            <a:spAutoFit/>
+          </a:bodyPr>
+          <a:lstStyle/>
+          <a:p>
+            <a:r>
+              <a:rPr kumimoji="1" lang="en-US" altLang="ja-JP" sz="3200" b="1" dirty="0">
+                <a:solidFill>
+                  <a:srgbClr val="FF0000"/>
+                </a:solidFill>
+              </a:rPr>
+              <a:t>Negentropy principle of information</a:t>
+            </a:r>
+            <a:endParaRPr kumimoji="1" lang="ja-JP" altLang="en-US" sz="3200" b="1" dirty="0">
+              <a:solidFill>
+                <a:srgbClr val="FF0000"/>
+              </a:solidFill>
+            </a:endParaRPr>
+          </a:p>
+        </p:txBody>
+      </p:sp>
+      <p:sp>
+        <p:nvSpPr>
+          <p:cNvPr id="8" name="TextBox 7">
+            <a:extLst>
+              <a:ext uri="{FF2B5EF4-FFF2-40B4-BE49-F238E27FC236}">
+                <a16:creationId xmlns:a16="http://schemas.microsoft.com/office/drawing/2014/main" id="{20E25641-3478-86D4-3883-DA8A3D01396A}"/>
+              </a:ext>
+            </a:extLst>
+          </p:cNvPr>
+          <p:cNvSpPr txBox="1"/>
+          <p:nvPr/>
+        </p:nvSpPr>
+        <p:spPr>
+          <a:xfrm>
+            <a:off x="71874" y="5159796"/>
+            <a:ext cx="7730001" cy="1323439"/>
+          </a:xfrm>
+          <a:prstGeom prst="rect">
+            <a:avLst/>
+          </a:prstGeom>
+          <a:noFill/>
+        </p:spPr>
+        <p:txBody>
+          <a:bodyPr wrap="none" rtlCol="0">
+            <a:spAutoFit/>
+          </a:bodyPr>
+          <a:lstStyle/>
+          <a:p>
+            <a:r>
+              <a:rPr lang="en-US" altLang="ja-JP" sz="2000" dirty="0"/>
+              <a:t>Observations are irreversible processes:</a:t>
+            </a:r>
+          </a:p>
+          <a:p>
+            <a:r>
+              <a:rPr lang="en-US" altLang="ja-JP" sz="2000" dirty="0"/>
+              <a:t>Energy must be degraded into heat when observing. </a:t>
+            </a:r>
+          </a:p>
+          <a:p>
+            <a:r>
+              <a:rPr kumimoji="1" lang="en-US" altLang="ja-JP" sz="2000" dirty="0"/>
+              <a:t>Observation apparatus makes a coupling with the environment</a:t>
+            </a:r>
+          </a:p>
+          <a:p>
+            <a:r>
+              <a:rPr lang="en-US" altLang="ja-JP" sz="2000" dirty="0"/>
+              <a:t>Strict causality should be replaced with statistical probabilities</a:t>
+            </a:r>
+            <a:endParaRPr kumimoji="1" lang="ja-JP" altLang="en-US" sz="2000" dirty="0"/>
+          </a:p>
+        </p:txBody>
+      </p:sp>
       <p:pic>
         <p:nvPicPr>
-          <p:cNvPr id="4" name="Picture 3">
-            <a:extLst>
-              <a:ext uri="{FF2B5EF4-FFF2-40B4-BE49-F238E27FC236}">
-                <a16:creationId xmlns:a16="http://schemas.microsoft.com/office/drawing/2014/main" id="{0424CF94-A711-F430-760F-4EF285ECA686}"/>
+          <p:cNvPr id="10" name="Picture 9">
+            <a:extLst>
+              <a:ext uri="{FF2B5EF4-FFF2-40B4-BE49-F238E27FC236}">
+                <a16:creationId xmlns:a16="http://schemas.microsoft.com/office/drawing/2014/main" id="{61D22B9E-DB9C-46ED-4B83-8DD416F3F8EC}"/>
               </a:ext>
             </a:extLst>
           </p:cNvPr>
@@ -3918,8 +4897,8 @@
         </p:blipFill>
         <p:spPr>
           <a:xfrm>
-            <a:off x="3055165" y="52001"/>
-            <a:ext cx="5455022" cy="3577942"/>
+            <a:off x="63277" y="1822575"/>
+            <a:ext cx="6979796" cy="971947"/>
           </a:xfrm>
           <a:prstGeom prst="rect">
             <a:avLst/>
@@ -3928,10 +4907,10 @@
       </p:pic>
       <p:pic>
         <p:nvPicPr>
-          <p:cNvPr id="6" name="Picture 5">
-            <a:extLst>
-              <a:ext uri="{FF2B5EF4-FFF2-40B4-BE49-F238E27FC236}">
-                <a16:creationId xmlns:a16="http://schemas.microsoft.com/office/drawing/2014/main" id="{4A1A733F-EBD8-B63F-3FFE-682178D3DC44}"/>
+          <p:cNvPr id="12" name="Picture 11">
+            <a:extLst>
+              <a:ext uri="{FF2B5EF4-FFF2-40B4-BE49-F238E27FC236}">
+                <a16:creationId xmlns:a16="http://schemas.microsoft.com/office/drawing/2014/main" id="{91A00C25-A170-8C34-5755-144085DA28C3}"/>
               </a:ext>
             </a:extLst>
           </p:cNvPr>
@@ -3948,8 +4927,8 @@
         </p:blipFill>
         <p:spPr>
           <a:xfrm>
-            <a:off x="2999569" y="3150772"/>
-            <a:ext cx="5566214" cy="3707228"/>
+            <a:off x="6868465" y="3788571"/>
+            <a:ext cx="5260258" cy="1047095"/>
           </a:xfrm>
           <a:prstGeom prst="rect">
             <a:avLst/>
@@ -3958,10 +4937,10 @@
       </p:pic>
       <p:pic>
         <p:nvPicPr>
-          <p:cNvPr id="10" name="Picture 9">
-            <a:extLst>
-              <a:ext uri="{FF2B5EF4-FFF2-40B4-BE49-F238E27FC236}">
-                <a16:creationId xmlns:a16="http://schemas.microsoft.com/office/drawing/2014/main" id="{3FA23F91-4483-234C-8C69-53C086106FCC}"/>
+          <p:cNvPr id="14" name="Picture 13">
+            <a:extLst>
+              <a:ext uri="{FF2B5EF4-FFF2-40B4-BE49-F238E27FC236}">
+                <a16:creationId xmlns:a16="http://schemas.microsoft.com/office/drawing/2014/main" id="{75CA131D-7C64-31E6-2B42-04330AD16E9A}"/>
               </a:ext>
             </a:extLst>
           </p:cNvPr>
@@ -3978,18 +4957,282 @@
         </p:blipFill>
         <p:spPr>
           <a:xfrm>
-            <a:off x="8510187" y="1014555"/>
-            <a:ext cx="3834744" cy="5230776"/>
+            <a:off x="176981" y="3788571"/>
+            <a:ext cx="6351946" cy="1110210"/>
           </a:xfrm>
           <a:prstGeom prst="rect">
             <a:avLst/>
           </a:prstGeom>
         </p:spPr>
       </p:pic>
+      <p:pic>
+        <p:nvPicPr>
+          <p:cNvPr id="16" name="Picture 15">
+            <a:extLst>
+              <a:ext uri="{FF2B5EF4-FFF2-40B4-BE49-F238E27FC236}">
+                <a16:creationId xmlns:a16="http://schemas.microsoft.com/office/drawing/2014/main" id="{41EAF4B6-8C2E-5CDD-D030-B36EEF040DE8}"/>
+              </a:ext>
+            </a:extLst>
+          </p:cNvPr>
+          <p:cNvPicPr>
+            <a:picLocks noChangeAspect="1"/>
+          </p:cNvPicPr>
+          <p:nvPr/>
+        </p:nvPicPr>
+        <p:blipFill>
+          <a:blip r:embed="rId6"/>
+          <a:stretch>
+            <a:fillRect/>
+          </a:stretch>
+        </p:blipFill>
+        <p:spPr>
+          <a:xfrm>
+            <a:off x="9187792" y="1734664"/>
+            <a:ext cx="2336391" cy="906469"/>
+          </a:xfrm>
+          <a:prstGeom prst="rect">
+            <a:avLst/>
+          </a:prstGeom>
+        </p:spPr>
+      </p:pic>
+      <p:sp>
+        <p:nvSpPr>
+          <p:cNvPr id="18" name="TextBox 17">
+            <a:extLst>
+              <a:ext uri="{FF2B5EF4-FFF2-40B4-BE49-F238E27FC236}">
+                <a16:creationId xmlns:a16="http://schemas.microsoft.com/office/drawing/2014/main" id="{B4268100-54F7-4533-2861-7AB1B4A2CB1E}"/>
+              </a:ext>
+            </a:extLst>
+          </p:cNvPr>
+          <p:cNvSpPr txBox="1"/>
+          <p:nvPr/>
+        </p:nvSpPr>
+        <p:spPr>
+          <a:xfrm>
+            <a:off x="8937972" y="1369079"/>
+            <a:ext cx="2836033" cy="584775"/>
+          </a:xfrm>
+          <a:prstGeom prst="rect">
+            <a:avLst/>
+          </a:prstGeom>
+          <a:noFill/>
+        </p:spPr>
+        <p:txBody>
+          <a:bodyPr wrap="none" rtlCol="0">
+            <a:spAutoFit/>
+          </a:bodyPr>
+          <a:lstStyle/>
+          <a:p>
+            <a:r>
+              <a:rPr kumimoji="1" lang="en-US" altLang="ja-JP" sz="3200" dirty="0"/>
+              <a:t>Precision in x:</a:t>
+            </a:r>
+            <a:endParaRPr kumimoji="1" lang="ja-JP" altLang="en-US" sz="3200" dirty="0"/>
+          </a:p>
+        </p:txBody>
+      </p:sp>
+      <p:sp>
+        <p:nvSpPr>
+          <p:cNvPr id="20" name="TextBox 19">
+            <a:extLst>
+              <a:ext uri="{FF2B5EF4-FFF2-40B4-BE49-F238E27FC236}">
+                <a16:creationId xmlns:a16="http://schemas.microsoft.com/office/drawing/2014/main" id="{14A2269D-B12D-8C3C-8885-D7D176B442DE}"/>
+              </a:ext>
+            </a:extLst>
+          </p:cNvPr>
+          <p:cNvSpPr txBox="1"/>
+          <p:nvPr/>
+        </p:nvSpPr>
+        <p:spPr>
+          <a:xfrm>
+            <a:off x="0" y="6464066"/>
+            <a:ext cx="12408310" cy="369332"/>
+          </a:xfrm>
+          <a:prstGeom prst="rect">
+            <a:avLst/>
+          </a:prstGeom>
+          <a:noFill/>
+        </p:spPr>
+        <p:txBody>
+          <a:bodyPr wrap="square">
+            <a:spAutoFit/>
+          </a:bodyPr>
+          <a:lstStyle/>
+          <a:p>
+            <a:r>
+              <a:rPr lang="ja-JP" altLang="ja-JP" sz="1800" b="1" i="0" dirty="0">
+                <a:solidFill>
+                  <a:srgbClr val="00B050"/>
+                </a:solidFill>
+                <a:effectLst/>
+                <a:latin typeface="+mn-lt"/>
+              </a:rPr>
+              <a:t>Brillouin, Leon. "The negentropy principle of information." </a:t>
+            </a:r>
+            <a:r>
+              <a:rPr lang="ja-JP" altLang="ja-JP" sz="1800" b="1" i="1" dirty="0">
+                <a:solidFill>
+                  <a:srgbClr val="00B050"/>
+                </a:solidFill>
+                <a:effectLst/>
+                <a:latin typeface="+mn-lt"/>
+              </a:rPr>
+              <a:t>Journal of Applied Physics</a:t>
+            </a:r>
+            <a:r>
+              <a:rPr lang="ja-JP" altLang="ja-JP" sz="1800" b="1" i="0" dirty="0">
+                <a:solidFill>
+                  <a:srgbClr val="00B050"/>
+                </a:solidFill>
+                <a:effectLst/>
+                <a:latin typeface="+mn-lt"/>
+              </a:rPr>
+              <a:t> 24.9 (1953): 1152-1163.</a:t>
+            </a:r>
+            <a:endParaRPr lang="ja-JP" altLang="en-US" b="1" dirty="0">
+              <a:solidFill>
+                <a:srgbClr val="00B050"/>
+              </a:solidFill>
+            </a:endParaRPr>
+          </a:p>
+        </p:txBody>
+      </p:sp>
+      <p:pic>
+        <p:nvPicPr>
+          <p:cNvPr id="24" name="Picture 23">
+            <a:extLst>
+              <a:ext uri="{FF2B5EF4-FFF2-40B4-BE49-F238E27FC236}">
+                <a16:creationId xmlns:a16="http://schemas.microsoft.com/office/drawing/2014/main" id="{75072AAC-9FA5-050C-3515-62F53C59F6A3}"/>
+              </a:ext>
+            </a:extLst>
+          </p:cNvPr>
+          <p:cNvPicPr>
+            <a:picLocks noChangeAspect="1"/>
+          </p:cNvPicPr>
+          <p:nvPr/>
+        </p:nvPicPr>
+        <p:blipFill>
+          <a:blip r:embed="rId7"/>
+          <a:stretch>
+            <a:fillRect/>
+          </a:stretch>
+        </p:blipFill>
+        <p:spPr>
+          <a:xfrm>
+            <a:off x="6944830" y="5279714"/>
+            <a:ext cx="4829175" cy="514350"/>
+          </a:xfrm>
+          <a:prstGeom prst="rect">
+            <a:avLst/>
+          </a:prstGeom>
+        </p:spPr>
+      </p:pic>
+      <p:sp>
+        <p:nvSpPr>
+          <p:cNvPr id="26" name="TextBox 25">
+            <a:extLst>
+              <a:ext uri="{FF2B5EF4-FFF2-40B4-BE49-F238E27FC236}">
+                <a16:creationId xmlns:a16="http://schemas.microsoft.com/office/drawing/2014/main" id="{FD2DD7A0-AA94-5C01-3222-72EBC57A28CD}"/>
+              </a:ext>
+            </a:extLst>
+          </p:cNvPr>
+          <p:cNvSpPr txBox="1"/>
+          <p:nvPr/>
+        </p:nvSpPr>
+        <p:spPr>
+          <a:xfrm>
+            <a:off x="9187792" y="2603635"/>
+            <a:ext cx="2388795" cy="461665"/>
+          </a:xfrm>
+          <a:prstGeom prst="rect">
+            <a:avLst/>
+          </a:prstGeom>
+          <a:noFill/>
+        </p:spPr>
+        <p:txBody>
+          <a:bodyPr wrap="none" rtlCol="0">
+            <a:spAutoFit/>
+          </a:bodyPr>
+          <a:lstStyle/>
+          <a:p>
+            <a:r>
+              <a:rPr lang="en-US" altLang="ja-JP" sz="2400" dirty="0"/>
+              <a:t>requires energy</a:t>
+            </a:r>
+            <a:endParaRPr kumimoji="1" lang="ja-JP" altLang="en-US" sz="2400" dirty="0"/>
+          </a:p>
+        </p:txBody>
+      </p:sp>
+      <p:sp>
+        <p:nvSpPr>
+          <p:cNvPr id="28" name="TextBox 27">
+            <a:extLst>
+              <a:ext uri="{FF2B5EF4-FFF2-40B4-BE49-F238E27FC236}">
+                <a16:creationId xmlns:a16="http://schemas.microsoft.com/office/drawing/2014/main" id="{C0003019-E196-BC78-6DA7-CC12C85823DD}"/>
+              </a:ext>
+            </a:extLst>
+          </p:cNvPr>
+          <p:cNvSpPr txBox="1"/>
+          <p:nvPr/>
+        </p:nvSpPr>
+        <p:spPr>
+          <a:xfrm>
+            <a:off x="7873749" y="4813065"/>
+            <a:ext cx="2673166" cy="369332"/>
+          </a:xfrm>
+          <a:prstGeom prst="rect">
+            <a:avLst/>
+          </a:prstGeom>
+          <a:noFill/>
+        </p:spPr>
+        <p:txBody>
+          <a:bodyPr wrap="square">
+            <a:spAutoFit/>
+          </a:bodyPr>
+          <a:lstStyle/>
+          <a:p>
+            <a:r>
+              <a:rPr lang="en-US" altLang="ja-JP" dirty="0"/>
+              <a:t>k</a:t>
+            </a:r>
+            <a:r>
+              <a:rPr lang="en-US" altLang="ja-JP" sz="1800" b="0" i="0" dirty="0">
+                <a:solidFill>
+                  <a:schemeClr val="tx1"/>
+                </a:solidFill>
+                <a:effectLst/>
+                <a:latin typeface="+mn-lt"/>
+              </a:rPr>
+              <a:t>=</a:t>
+            </a:r>
+            <a:r>
+              <a:rPr lang="ja-JP" altLang="ja-JP" sz="1800" b="0" i="0" dirty="0">
+                <a:solidFill>
+                  <a:schemeClr val="tx1"/>
+                </a:solidFill>
+                <a:effectLst/>
+                <a:latin typeface="+mn-lt"/>
+              </a:rPr>
+              <a:t>1.380649 × 10</a:t>
+            </a:r>
+            <a:r>
+              <a:rPr lang="ja-JP" altLang="ja-JP" b="0" i="0" baseline="30000" dirty="0">
+                <a:solidFill>
+                  <a:schemeClr val="tx1"/>
+                </a:solidFill>
+                <a:effectLst/>
+                <a:latin typeface="+mn-lt"/>
+              </a:rPr>
+              <a:t>-23</a:t>
+            </a:r>
+            <a:endParaRPr lang="ja-JP" altLang="en-US" dirty="0"/>
+          </a:p>
+        </p:txBody>
+      </p:sp>
     </p:spTree>
     <p:extLst>
       <p:ext uri="{BB962C8B-B14F-4D97-AF65-F5344CB8AC3E}">
-        <p14:creationId xmlns:p14="http://schemas.microsoft.com/office/powerpoint/2010/main" val="2417633127"/>
+        <p14:creationId xmlns:p14="http://schemas.microsoft.com/office/powerpoint/2010/main" val="2651775146"/>
       </p:ext>
     </p:extLst>
   </p:cSld>
@@ -4016,6 +5259,156 @@
           <a:chExt cx="0" cy="0"/>
         </a:xfrm>
       </p:grpSpPr>
+      <p:pic>
+        <p:nvPicPr>
+          <p:cNvPr id="8" name="Picture 7">
+            <a:extLst>
+              <a:ext uri="{FF2B5EF4-FFF2-40B4-BE49-F238E27FC236}">
+                <a16:creationId xmlns:a16="http://schemas.microsoft.com/office/drawing/2014/main" id="{161AD8D0-CE3B-F570-FFBB-4922B009FD8C}"/>
+              </a:ext>
+            </a:extLst>
+          </p:cNvPr>
+          <p:cNvPicPr>
+            <a:picLocks noChangeAspect="1"/>
+          </p:cNvPicPr>
+          <p:nvPr/>
+        </p:nvPicPr>
+        <p:blipFill>
+          <a:blip r:embed="rId2"/>
+          <a:stretch>
+            <a:fillRect/>
+          </a:stretch>
+        </p:blipFill>
+        <p:spPr>
+          <a:xfrm>
+            <a:off x="0" y="827088"/>
+            <a:ext cx="3302622" cy="5046530"/>
+          </a:xfrm>
+          <a:prstGeom prst="rect">
+            <a:avLst/>
+          </a:prstGeom>
+        </p:spPr>
+      </p:pic>
+      <p:pic>
+        <p:nvPicPr>
+          <p:cNvPr id="4" name="Picture 3">
+            <a:extLst>
+              <a:ext uri="{FF2B5EF4-FFF2-40B4-BE49-F238E27FC236}">
+                <a16:creationId xmlns:a16="http://schemas.microsoft.com/office/drawing/2014/main" id="{0424CF94-A711-F430-760F-4EF285ECA686}"/>
+              </a:ext>
+            </a:extLst>
+          </p:cNvPr>
+          <p:cNvPicPr>
+            <a:picLocks noChangeAspect="1"/>
+          </p:cNvPicPr>
+          <p:nvPr/>
+        </p:nvPicPr>
+        <p:blipFill>
+          <a:blip r:embed="rId3"/>
+          <a:stretch>
+            <a:fillRect/>
+          </a:stretch>
+        </p:blipFill>
+        <p:spPr>
+          <a:xfrm>
+            <a:off x="3055165" y="52001"/>
+            <a:ext cx="5455022" cy="3577942"/>
+          </a:xfrm>
+          <a:prstGeom prst="rect">
+            <a:avLst/>
+          </a:prstGeom>
+        </p:spPr>
+      </p:pic>
+      <p:pic>
+        <p:nvPicPr>
+          <p:cNvPr id="6" name="Picture 5">
+            <a:extLst>
+              <a:ext uri="{FF2B5EF4-FFF2-40B4-BE49-F238E27FC236}">
+                <a16:creationId xmlns:a16="http://schemas.microsoft.com/office/drawing/2014/main" id="{4A1A733F-EBD8-B63F-3FFE-682178D3DC44}"/>
+              </a:ext>
+            </a:extLst>
+          </p:cNvPr>
+          <p:cNvPicPr>
+            <a:picLocks noChangeAspect="1"/>
+          </p:cNvPicPr>
+          <p:nvPr/>
+        </p:nvPicPr>
+        <p:blipFill>
+          <a:blip r:embed="rId4"/>
+          <a:stretch>
+            <a:fillRect/>
+          </a:stretch>
+        </p:blipFill>
+        <p:spPr>
+          <a:xfrm>
+            <a:off x="2999569" y="3150772"/>
+            <a:ext cx="5566214" cy="3707228"/>
+          </a:xfrm>
+          <a:prstGeom prst="rect">
+            <a:avLst/>
+          </a:prstGeom>
+        </p:spPr>
+      </p:pic>
+      <p:pic>
+        <p:nvPicPr>
+          <p:cNvPr id="10" name="Picture 9">
+            <a:extLst>
+              <a:ext uri="{FF2B5EF4-FFF2-40B4-BE49-F238E27FC236}">
+                <a16:creationId xmlns:a16="http://schemas.microsoft.com/office/drawing/2014/main" id="{3FA23F91-4483-234C-8C69-53C086106FCC}"/>
+              </a:ext>
+            </a:extLst>
+          </p:cNvPr>
+          <p:cNvPicPr>
+            <a:picLocks noChangeAspect="1"/>
+          </p:cNvPicPr>
+          <p:nvPr/>
+        </p:nvPicPr>
+        <p:blipFill>
+          <a:blip r:embed="rId5"/>
+          <a:stretch>
+            <a:fillRect/>
+          </a:stretch>
+        </p:blipFill>
+        <p:spPr>
+          <a:xfrm>
+            <a:off x="8510187" y="1014555"/>
+            <a:ext cx="3834744" cy="5230776"/>
+          </a:xfrm>
+          <a:prstGeom prst="rect">
+            <a:avLst/>
+          </a:prstGeom>
+        </p:spPr>
+      </p:pic>
+    </p:spTree>
+    <p:extLst>
+      <p:ext uri="{BB962C8B-B14F-4D97-AF65-F5344CB8AC3E}">
+        <p14:creationId xmlns:p14="http://schemas.microsoft.com/office/powerpoint/2010/main" val="2417633127"/>
+      </p:ext>
+    </p:extLst>
+  </p:cSld>
+  <p:clrMapOvr>
+    <a:masterClrMapping/>
+  </p:clrMapOvr>
+</p:sld>
+</file>
+
+<file path=ppt/slides/slide4.xml><?xml version="1.0" encoding="utf-8"?>
+<p:sld xmlns:a="http://schemas.openxmlformats.org/drawingml/2006/main" xmlns:r="http://schemas.openxmlformats.org/officeDocument/2006/relationships" xmlns:p="http://schemas.openxmlformats.org/presentationml/2006/main">
+  <p:cSld>
+    <p:spTree>
+      <p:nvGrpSpPr>
+        <p:cNvPr id="1" name=""/>
+        <p:cNvGrpSpPr/>
+        <p:nvPr/>
+      </p:nvGrpSpPr>
+      <p:grpSpPr>
+        <a:xfrm>
+          <a:off x="0" y="0"/>
+          <a:ext cx="0" cy="0"/>
+          <a:chOff x="0" y="0"/>
+          <a:chExt cx="0" cy="0"/>
+        </a:xfrm>
+      </p:grpSpPr>
       <p:sp>
         <p:nvSpPr>
           <p:cNvPr id="2" name="Title 1">
@@ -4519,7 +5912,7 @@
 </p:sld>
 </file>
 
-<file path=ppt/slides/slide4.xml><?xml version="1.0" encoding="utf-8"?>
+<file path=ppt/slides/slide5.xml><?xml version="1.0" encoding="utf-8"?>
 <p:sld xmlns:a="http://schemas.openxmlformats.org/drawingml/2006/main" xmlns:r="http://schemas.openxmlformats.org/officeDocument/2006/relationships" xmlns:p="http://schemas.openxmlformats.org/presentationml/2006/main">
   <p:cSld>
     <p:spTree>
@@ -4949,6 +6342,321 @@
 </a:theme>
 </file>
 
+<file path=ppt/theme/theme2.xml><?xml version="1.0" encoding="utf-8"?>
+<a:theme xmlns:a="http://schemas.openxmlformats.org/drawingml/2006/main" name="Office Theme">
+  <a:themeElements>
+    <a:clrScheme name="Office">
+      <a:dk1>
+        <a:sysClr val="windowText" lastClr="000000"/>
+      </a:dk1>
+      <a:lt1>
+        <a:sysClr val="window" lastClr="FFFFFF"/>
+      </a:lt1>
+      <a:dk2>
+        <a:srgbClr val="0E2841"/>
+      </a:dk2>
+      <a:lt2>
+        <a:srgbClr val="E8E8E8"/>
+      </a:lt2>
+      <a:accent1>
+        <a:srgbClr val="156082"/>
+      </a:accent1>
+      <a:accent2>
+        <a:srgbClr val="E97132"/>
+      </a:accent2>
+      <a:accent3>
+        <a:srgbClr val="196B24"/>
+      </a:accent3>
+      <a:accent4>
+        <a:srgbClr val="0F9ED5"/>
+      </a:accent4>
+      <a:accent5>
+        <a:srgbClr val="A02B93"/>
+      </a:accent5>
+      <a:accent6>
+        <a:srgbClr val="4EA72E"/>
+      </a:accent6>
+      <a:hlink>
+        <a:srgbClr val="467886"/>
+      </a:hlink>
+      <a:folHlink>
+        <a:srgbClr val="96607D"/>
+      </a:folHlink>
+    </a:clrScheme>
+    <a:fontScheme name="Office">
+      <a:majorFont>
+        <a:latin typeface="游ゴシック Light" panose="02110004020202020204"/>
+        <a:ea typeface=""/>
+        <a:cs typeface=""/>
+        <a:font script="Jpan" typeface="游ゴシック Light"/>
+        <a:font script="Hang" typeface="맑은 고딕"/>
+        <a:font script="Hans" typeface="等线 Light"/>
+        <a:font script="Hant" typeface="新細明體"/>
+        <a:font script="Arab" typeface="Times New Roman"/>
+        <a:font script="Hebr" typeface="Times New Roman"/>
+        <a:font script="Thai" typeface="Angsana New"/>
+        <a:font script="Ethi" typeface="Nyala"/>
+        <a:font script="Beng" typeface="Vrinda"/>
+        <a:font script="Gujr" typeface="Shruti"/>
+        <a:font script="Khmr" typeface="MoolBoran"/>
+        <a:font script="Knda" typeface="Tunga"/>
+        <a:font script="Guru" typeface="Raavi"/>
+        <a:font script="Cans" typeface="Euphemia"/>
+        <a:font script="Cher" typeface="Plantagenet Cherokee"/>
+        <a:font script="Yiii" typeface="Microsoft Yi Baiti"/>
+        <a:font script="Tibt" typeface="Microsoft Himalaya"/>
+        <a:font script="Thaa" typeface="MV Boli"/>
+        <a:font script="Deva" typeface="Mangal"/>
+        <a:font script="Telu" typeface="Gautami"/>
+        <a:font script="Taml" typeface="Latha"/>
+        <a:font script="Syrc" typeface="Estrangelo Edessa"/>
+        <a:font script="Orya" typeface="Kalinga"/>
+        <a:font script="Mlym" typeface="Kartika"/>
+        <a:font script="Laoo" typeface="DokChampa"/>
+        <a:font script="Sinh" typeface="Iskoola Pota"/>
+        <a:font script="Mong" typeface="Mongolian Baiti"/>
+        <a:font script="Viet" typeface="Times New Roman"/>
+        <a:font script="Uigh" typeface="Microsoft Uighur"/>
+        <a:font script="Geor" typeface="Sylfaen"/>
+        <a:font script="Armn" typeface="Arial"/>
+        <a:font script="Bugi" typeface="Leelawadee UI"/>
+        <a:font script="Bopo" typeface="Microsoft JhengHei"/>
+        <a:font script="Java" typeface="Javanese Text"/>
+        <a:font script="Lisu" typeface="Segoe UI"/>
+        <a:font script="Mymr" typeface="Myanmar Text"/>
+        <a:font script="Nkoo" typeface="Ebrima"/>
+        <a:font script="Olck" typeface="Nirmala UI"/>
+        <a:font script="Osma" typeface="Ebrima"/>
+        <a:font script="Phag" typeface="Phagspa"/>
+        <a:font script="Syrn" typeface="Estrangelo Edessa"/>
+        <a:font script="Syrj" typeface="Estrangelo Edessa"/>
+        <a:font script="Syre" typeface="Estrangelo Edessa"/>
+        <a:font script="Sora" typeface="Nirmala UI"/>
+        <a:font script="Tale" typeface="Microsoft Tai Le"/>
+        <a:font script="Talu" typeface="Microsoft New Tai Lue"/>
+        <a:font script="Tfng" typeface="Ebrima"/>
+      </a:majorFont>
+      <a:minorFont>
+        <a:latin typeface="游ゴシック" panose="02110004020202020204"/>
+        <a:ea typeface=""/>
+        <a:cs typeface=""/>
+        <a:font script="Jpan" typeface="游ゴシック"/>
+        <a:font script="Hang" typeface="맑은 고딕"/>
+        <a:font script="Hans" typeface="等线"/>
+        <a:font script="Hant" typeface="新細明體"/>
+        <a:font script="Arab" typeface="Arial"/>
+        <a:font script="Hebr" typeface="Arial"/>
+        <a:font script="Thai" typeface="Cordia New"/>
+        <a:font script="Ethi" typeface="Nyala"/>
+        <a:font script="Beng" typeface="Vrinda"/>
+        <a:font script="Gujr" typeface="Shruti"/>
+        <a:font script="Khmr" typeface="DaunPenh"/>
+        <a:font script="Knda" typeface="Tunga"/>
+        <a:font script="Guru" typeface="Raavi"/>
+        <a:font script="Cans" typeface="Euphemia"/>
+        <a:font script="Cher" typeface="Plantagenet Cherokee"/>
+        <a:font script="Yiii" typeface="Microsoft Yi Baiti"/>
+        <a:font script="Tibt" typeface="Microsoft Himalaya"/>
+        <a:font script="Thaa" typeface="MV Boli"/>
+        <a:font script="Deva" typeface="Mangal"/>
+        <a:font script="Telu" typeface="Gautami"/>
+        <a:font script="Taml" typeface="Latha"/>
+        <a:font script="Syrc" typeface="Estrangelo Edessa"/>
+        <a:font script="Orya" typeface="Kalinga"/>
+        <a:font script="Mlym" typeface="Kartika"/>
+        <a:font script="Laoo" typeface="DokChampa"/>
+        <a:font script="Sinh" typeface="Iskoola Pota"/>
+        <a:font script="Mong" typeface="Mongolian Baiti"/>
+        <a:font script="Viet" typeface="Arial"/>
+        <a:font script="Uigh" typeface="Microsoft Uighur"/>
+        <a:font script="Geor" typeface="Sylfaen"/>
+        <a:font script="Armn" typeface="Arial"/>
+        <a:font script="Bugi" typeface="Leelawadee UI"/>
+        <a:font script="Bopo" typeface="Microsoft JhengHei"/>
+        <a:font script="Java" typeface="Javanese Text"/>
+        <a:font script="Lisu" typeface="Segoe UI"/>
+        <a:font script="Mymr" typeface="Myanmar Text"/>
+        <a:font script="Nkoo" typeface="Ebrima"/>
+        <a:font script="Olck" typeface="Nirmala UI"/>
+        <a:font script="Osma" typeface="Ebrima"/>
+        <a:font script="Phag" typeface="Phagspa"/>
+        <a:font script="Syrn" typeface="Estrangelo Edessa"/>
+        <a:font script="Syrj" typeface="Estrangelo Edessa"/>
+        <a:font script="Syre" typeface="Estrangelo Edessa"/>
+        <a:font script="Sora" typeface="Nirmala UI"/>
+        <a:font script="Tale" typeface="Microsoft Tai Le"/>
+        <a:font script="Talu" typeface="Microsoft New Tai Lue"/>
+        <a:font script="Tfng" typeface="Ebrima"/>
+      </a:minorFont>
+    </a:fontScheme>
+    <a:fmtScheme name="Office">
+      <a:fillStyleLst>
+        <a:solidFill>
+          <a:schemeClr val="phClr"/>
+        </a:solidFill>
+        <a:gradFill rotWithShape="1">
+          <a:gsLst>
+            <a:gs pos="0">
+              <a:schemeClr val="phClr">
+                <a:lumMod val="110000"/>
+                <a:satMod val="105000"/>
+                <a:tint val="67000"/>
+              </a:schemeClr>
+            </a:gs>
+            <a:gs pos="50000">
+              <a:schemeClr val="phClr">
+                <a:lumMod val="105000"/>
+                <a:satMod val="103000"/>
+                <a:tint val="73000"/>
+              </a:schemeClr>
+            </a:gs>
+            <a:gs pos="100000">
+              <a:schemeClr val="phClr">
+                <a:lumMod val="105000"/>
+                <a:satMod val="109000"/>
+                <a:tint val="81000"/>
+              </a:schemeClr>
+            </a:gs>
+          </a:gsLst>
+          <a:lin ang="5400000" scaled="0"/>
+        </a:gradFill>
+        <a:gradFill rotWithShape="1">
+          <a:gsLst>
+            <a:gs pos="0">
+              <a:schemeClr val="phClr">
+                <a:satMod val="103000"/>
+                <a:lumMod val="102000"/>
+                <a:tint val="94000"/>
+              </a:schemeClr>
+            </a:gs>
+            <a:gs pos="50000">
+              <a:schemeClr val="phClr">
+                <a:satMod val="110000"/>
+                <a:lumMod val="100000"/>
+                <a:shade val="100000"/>
+              </a:schemeClr>
+            </a:gs>
+            <a:gs pos="100000">
+              <a:schemeClr val="phClr">
+                <a:lumMod val="99000"/>
+                <a:satMod val="120000"/>
+                <a:shade val="78000"/>
+              </a:schemeClr>
+            </a:gs>
+          </a:gsLst>
+          <a:lin ang="5400000" scaled="0"/>
+        </a:gradFill>
+      </a:fillStyleLst>
+      <a:lnStyleLst>
+        <a:ln w="12700" cap="flat" cmpd="sng" algn="ctr">
+          <a:solidFill>
+            <a:schemeClr val="phClr"/>
+          </a:solidFill>
+          <a:prstDash val="solid"/>
+          <a:miter lim="800000"/>
+        </a:ln>
+        <a:ln w="19050" cap="flat" cmpd="sng" algn="ctr">
+          <a:solidFill>
+            <a:schemeClr val="phClr"/>
+          </a:solidFill>
+          <a:prstDash val="solid"/>
+          <a:miter lim="800000"/>
+        </a:ln>
+        <a:ln w="25400" cap="flat" cmpd="sng" algn="ctr">
+          <a:solidFill>
+            <a:schemeClr val="phClr"/>
+          </a:solidFill>
+          <a:prstDash val="solid"/>
+          <a:miter lim="800000"/>
+        </a:ln>
+      </a:lnStyleLst>
+      <a:effectStyleLst>
+        <a:effectStyle>
+          <a:effectLst/>
+        </a:effectStyle>
+        <a:effectStyle>
+          <a:effectLst/>
+        </a:effectStyle>
+        <a:effectStyle>
+          <a:effectLst>
+            <a:outerShdw blurRad="57150" dist="19050" dir="5400000" algn="ctr" rotWithShape="0">
+              <a:srgbClr val="000000">
+                <a:alpha val="63000"/>
+              </a:srgbClr>
+            </a:outerShdw>
+          </a:effectLst>
+        </a:effectStyle>
+      </a:effectStyleLst>
+      <a:bgFillStyleLst>
+        <a:solidFill>
+          <a:schemeClr val="phClr"/>
+        </a:solidFill>
+        <a:solidFill>
+          <a:schemeClr val="phClr">
+            <a:tint val="95000"/>
+            <a:satMod val="170000"/>
+          </a:schemeClr>
+        </a:solidFill>
+        <a:gradFill rotWithShape="1">
+          <a:gsLst>
+            <a:gs pos="0">
+              <a:schemeClr val="phClr">
+                <a:tint val="93000"/>
+                <a:satMod val="150000"/>
+                <a:shade val="98000"/>
+                <a:lumMod val="102000"/>
+              </a:schemeClr>
+            </a:gs>
+            <a:gs pos="50000">
+              <a:schemeClr val="phClr">
+                <a:tint val="98000"/>
+                <a:satMod val="130000"/>
+                <a:shade val="90000"/>
+                <a:lumMod val="103000"/>
+              </a:schemeClr>
+            </a:gs>
+            <a:gs pos="100000">
+              <a:schemeClr val="phClr">
+                <a:shade val="63000"/>
+                <a:satMod val="120000"/>
+              </a:schemeClr>
+            </a:gs>
+          </a:gsLst>
+          <a:lin ang="5400000" scaled="0"/>
+        </a:gradFill>
+      </a:bgFillStyleLst>
+    </a:fmtScheme>
+  </a:themeElements>
+  <a:objectDefaults>
+    <a:lnDef>
+      <a:spPr/>
+      <a:bodyPr/>
+      <a:lstStyle/>
+      <a:style>
+        <a:lnRef idx="2">
+          <a:schemeClr val="accent1"/>
+        </a:lnRef>
+        <a:fillRef idx="0">
+          <a:schemeClr val="accent1"/>
+        </a:fillRef>
+        <a:effectRef idx="1">
+          <a:schemeClr val="accent1"/>
+        </a:effectRef>
+        <a:fontRef idx="minor">
+          <a:schemeClr val="tx1"/>
+        </a:fontRef>
+      </a:style>
+    </a:lnDef>
+  </a:objectDefaults>
+  <a:extraClrSchemeLst/>
+  <a:extLst>
+    <a:ext uri="{05A4C25C-085E-4340-85A3-A5531E510DB2}">
+      <thm15:themeFamily xmlns:thm15="http://schemas.microsoft.com/office/thememl/2012/main" name="Office Theme" id="{2E142A2C-CD16-42D6-873A-C26D2A0506FA}" vid="{1BDDFF52-6CD6-40A5-AB3C-68EB2F1E4D0A}"/>
+    </a:ext>
+  </a:extLst>
+</a:theme>
+</file>
+
 <file path=docMetadata/LabelInfo.xml><?xml version="1.0" encoding="utf-8"?>
 <clbl:labelList xmlns:clbl="http://schemas.microsoft.com/office/2020/mipLabelMetadata">
   <clbl:label id="{1f8e20e6-048a-4bad-a26b-318dd1cd4d47}" enabled="1" method="Privileged" siteId="{66c65d8a-9158-4521-a2d8-664963db48e4}" contentBits="0" removed="0"/>
